--- a/decks/geog-resources/geog-resources_ch6_renewable-and-sustainable.pptx
+++ b/decks/geog-resources/geog-resources_ch6_renewable-and-sustainable.pptx
@@ -130,30 +130,30 @@
   <p:extLst>
     <p:ext uri="{521415D9-36F7-43E2-AB2F-B90AF26B5E84}">
       <p14:sectionLst xmlns:p14="http://schemas.microsoft.com/office/powerpoint/2010/main">
-        <p14:section name="Opening" id="{acb43a14-3949-e91e-4682-55fea6085d02}">
+        <p14:section name="Opening" id="{675d0462-e2d3-7d86-59d7-486d9576e482}">
           <p14:sldIdLst>
             <p14:sldId id="256"/>
           </p14:sldIdLst>
         </p14:section>
-        <p14:section name="Gate" id="{8b22bcf1-3693-1652-58a9-1d6ef99ae052}">
+        <p14:section name="Gate" id="{b597cda1-3a81-30bf-1630-e7875a447816}">
           <p14:sldIdLst>
             <p14:sldId id="257"/>
             <p14:sldId id="258"/>
           </p14:sldIdLst>
         </p14:section>
-        <p14:section name="Pre-teach" id="{87b04e87-60be-a385-dd13-669717a7e183}">
+        <p14:section name="Pre-teach" id="{688b6857-0e0d-059a-d467-19875761116a}">
           <p14:sldIdLst>
             <p14:sldId id="259"/>
             <p14:sldId id="260"/>
           </p14:sldIdLst>
         </p14:section>
-        <p14:section name="Read-along" id="{ee584e5f-9d9b-bf84-9f7f-ca738ff4dd1a}">
+        <p14:section name="Read-along" id="{1f5c1182-eaeb-2f27-7ec8-be8a19b7a423}">
           <p14:sldIdLst>
             <p14:sldId id="261"/>
             <p14:sldId id="262"/>
           </p14:sldIdLst>
         </p14:section>
-        <p14:section name="Teach" id="{111de147-59dd-6a62-ff47-87f4f1df1cb9}">
+        <p14:section name="Teach" id="{0f8c318e-25c1-ead6-a778-f7f698fac8c6}">
           <p14:sldIdLst>
             <p14:sldId id="263"/>
             <p14:sldId id="264"/>
@@ -164,7 +164,7 @@
             <p14:sldId id="269"/>
           </p14:sldIdLst>
         </p14:section>
-        <p14:section name="Routes" id="{94ee13c4-b309-53b9-2f66-e45a2b49e23e}">
+        <p14:section name="Routes" id="{c11b7ccf-dfc3-87cb-1e78-b995aacd1c67}">
           <p14:sldIdLst>
             <p14:sldId id="270"/>
             <p14:sldId id="271"/>
@@ -174,12 +174,12 @@
             <p14:sldId id="275"/>
           </p14:sldIdLst>
         </p14:section>
-        <p14:section name="Close" id="{703bed63-36f0-cc21-c111-38071730e522}">
+        <p14:section name="Close" id="{7c089023-0d36-3763-1a34-7485d127429f}">
           <p14:sldIdLst>
             <p14:sldId id="276"/>
           </p14:sldIdLst>
         </p14:section>
-        <p14:section name="Answers" id="{eb392793-7600-1498-1087-c225117ea048}">
+        <p14:section name="Answers" id="{aad5fe22-933d-c965-67d6-a89cbd4adc29}">
           <p14:sldIdLst>
             <p14:sldId id="277"/>
             <p14:sldId id="278"/>
